--- a/PayGuard_Presentation_BillautaGang.pptx
+++ b/PayGuard_Presentation_BillautaGang.pptx
@@ -3790,7 +3790,7 @@
               </a:defRPr>
             </a:pPr>
             <a:r>
-              <a:t>Team Billauta Gang  ·  Project ID: A132  ·  PayGuard</a:t>
+              <a:t>Team Billauta Gang  ·  Team ID: A132  ·  PayGuard</a:t>
             </a:r>
           </a:p>
         </p:txBody>
